--- a/中間発表.pptx
+++ b/中間発表.pptx
@@ -8408,16 +8408,70 @@
               <a:t>→</a:t>
             </a:r>
             <a:r>
-              <a:rPr lang="en-US" sz="3200" b="0" u="none" strike="noStrike" dirty="0" err="1">
-                <a:solidFill>
-                  <a:schemeClr val="dk1"/>
-                </a:solidFill>
-                <a:effectLst/>
-                <a:uFillTx/>
+              <a:rPr lang="en-US" altLang="ja-JP" sz="3200" dirty="0">
+                <a:solidFill>
+                  <a:schemeClr val="dk1"/>
+                </a:solidFill>
                 <a:latin typeface="ＭＳ Ｐゴシック"/>
                 <a:ea typeface="ＭＳ Ｐゴシック"/>
               </a:rPr>
-              <a:t>奥行方向の精度が悪い</a:t>
+              <a:t>Z</a:t>
+            </a:r>
+            <a:r>
+              <a:rPr lang="ja-JP" altLang="en-US" sz="3200" dirty="0">
+                <a:solidFill>
+                  <a:schemeClr val="dk1"/>
+                </a:solidFill>
+                <a:latin typeface="ＭＳ Ｐゴシック"/>
+                <a:ea typeface="ＭＳ Ｐゴシック"/>
+              </a:rPr>
+              <a:t>軸</a:t>
+            </a:r>
+            <a:r>
+              <a:rPr lang="en-US" altLang="ja-JP" sz="3200" dirty="0">
+                <a:solidFill>
+                  <a:schemeClr val="dk1"/>
+                </a:solidFill>
+                <a:latin typeface="ＭＳ Ｐゴシック"/>
+                <a:ea typeface="ＭＳ Ｐゴシック"/>
+              </a:rPr>
+              <a:t>(</a:t>
+            </a:r>
+            <a:r>
+              <a:rPr lang="en-US" sz="3200" b="0" u="none" strike="noStrike" dirty="0" err="1">
+                <a:solidFill>
+                  <a:schemeClr val="dk1"/>
+                </a:solidFill>
+                <a:effectLst/>
+                <a:uFillTx/>
+                <a:latin typeface="ＭＳ Ｐゴシック"/>
+                <a:ea typeface="ＭＳ Ｐゴシック"/>
+              </a:rPr>
+              <a:t>奥行方向</a:t>
+            </a:r>
+            <a:r>
+              <a:rPr lang="en-US" sz="3200" b="0" u="none" strike="noStrike" dirty="0">
+                <a:solidFill>
+                  <a:schemeClr val="dk1"/>
+                </a:solidFill>
+                <a:effectLst/>
+                <a:uFillTx/>
+                <a:latin typeface="ＭＳ Ｐゴシック"/>
+                <a:ea typeface="ＭＳ Ｐゴシック"/>
+              </a:rPr>
+              <a:t>)</a:t>
+            </a:r>
+            <a:r>
+              <a:rPr lang="en-US" sz="3200" b="0" u="none" strike="noStrike" dirty="0" err="1">
+                <a:solidFill>
+                  <a:schemeClr val="dk1"/>
+                </a:solidFill>
+                <a:effectLst/>
+                <a:uFillTx/>
+                <a:latin typeface="ＭＳ Ｐゴシック"/>
+                <a:ea typeface="ＭＳ Ｐゴシック"/>
+              </a:rPr>
+              <a:t>の精度が悪い</a:t>
             </a:r>
             <a:endParaRPr lang="en-US" sz="3200" b="0" u="none" strike="noStrike" dirty="0">
               <a:solidFill>
@@ -8689,7 +8743,7 @@
           <a:lstStyle/>
           <a:p>
             <a:r>
-              <a:rPr lang="ja-JP" sz="2100" b="0" u="none" strike="noStrike">
+              <a:rPr lang="ja-JP" sz="2100" b="0" u="none" strike="noStrike" dirty="0">
                 <a:solidFill>
                   <a:schemeClr val="dk1"/>
                 </a:solidFill>
@@ -8700,7 +8754,7 @@
               </a:rPr>
               <a:t>画像出典：岡崎優斗　”キーボード入力時の手形状検出と指先座標の推定”</a:t>
             </a:r>
-            <a:endParaRPr lang="en-US" sz="2100" b="0" u="none" strike="noStrike">
+            <a:endParaRPr lang="en-US" sz="2100" b="0" u="none" strike="noStrike" dirty="0">
               <a:solidFill>
                 <a:srgbClr val="000000"/>
               </a:solidFill>
@@ -8711,7 +8765,7 @@
           </a:p>
           <a:p>
             <a:r>
-              <a:rPr lang="en-US" sz="2100" b="0" u="none" strike="noStrike">
+              <a:rPr lang="en-US" sz="2100" b="0" u="none" strike="noStrike" dirty="0">
                 <a:solidFill>
                   <a:schemeClr val="dk1"/>
                 </a:solidFill>
@@ -8723,7 +8777,7 @@
               <a:t>	</a:t>
             </a:r>
             <a:r>
-              <a:rPr lang="ja-JP" sz="2100" b="0" u="none" strike="noStrike">
+              <a:rPr lang="ja-JP" sz="2100" b="0" u="none" strike="noStrike" dirty="0">
                 <a:solidFill>
                   <a:schemeClr val="dk1"/>
                 </a:solidFill>
@@ -8735,7 +8789,7 @@
               <a:t>　鈴鹿工業高等専門学校卒業研究論文　</a:t>
             </a:r>
             <a:r>
-              <a:rPr lang="en-US" sz="2100" b="0" u="none" strike="noStrike">
+              <a:rPr lang="en-US" sz="2100" b="0" u="none" strike="noStrike" dirty="0">
                 <a:solidFill>
                   <a:schemeClr val="dk1"/>
                 </a:solidFill>
@@ -8747,7 +8801,7 @@
               <a:t>2024 </a:t>
             </a:r>
             <a:r>
-              <a:rPr lang="ja-JP" sz="2100" b="0" u="none" strike="noStrike">
+              <a:rPr lang="ja-JP" sz="2100" b="0" u="none" strike="noStrike" dirty="0">
                 <a:solidFill>
                   <a:schemeClr val="dk1"/>
                 </a:solidFill>
@@ -8758,7 +8812,7 @@
               </a:rPr>
               <a:t>年度</a:t>
             </a:r>
-            <a:endParaRPr lang="en-US" sz="2100" b="0" u="none" strike="noStrike">
+            <a:endParaRPr lang="en-US" sz="2100" b="0" u="none" strike="noStrike" dirty="0">
               <a:solidFill>
                 <a:srgbClr val="000000"/>
               </a:solidFill>
@@ -9223,7 +9277,39 @@
                 <a:latin typeface="ＭＳ Ｐゴシック"/>
                 <a:ea typeface="ＭＳ Ｐゴシック"/>
               </a:rPr>
-              <a:t>によりそれぞれの２次元座標を検出</a:t>
+              <a:t>によりそれぞれの</a:t>
+            </a:r>
+            <a:r>
+              <a:rPr lang="ja-JP" altLang="en-US" sz="3200" dirty="0">
+                <a:solidFill>
+                  <a:schemeClr val="dk1"/>
+                </a:solidFill>
+                <a:latin typeface="ＭＳ Ｐゴシック"/>
+                <a:ea typeface="ＭＳ Ｐゴシック"/>
+              </a:rPr>
+              <a:t>二</a:t>
+            </a:r>
+            <a:r>
+              <a:rPr lang="ja-JP" sz="3200" b="0" u="none" strike="noStrike" dirty="0">
+                <a:solidFill>
+                  <a:schemeClr val="dk1"/>
+                </a:solidFill>
+                <a:effectLst/>
+                <a:uFillTx/>
+                <a:latin typeface="ＭＳ Ｐゴシック"/>
+                <a:ea typeface="ＭＳ Ｐゴシック"/>
+              </a:rPr>
+              <a:t>次元座標を</a:t>
+            </a:r>
+            <a:r>
+              <a:rPr lang="ja-JP" altLang="en-US" sz="3200" dirty="0">
+                <a:solidFill>
+                  <a:schemeClr val="dk1"/>
+                </a:solidFill>
+                <a:latin typeface="ＭＳ Ｐゴシック"/>
+                <a:ea typeface="ＭＳ Ｐゴシック"/>
+              </a:rPr>
+              <a:t>推定</a:t>
             </a:r>
             <a:endParaRPr lang="en-US" sz="3200" b="0" u="none" strike="noStrike" dirty="0">
               <a:solidFill>
@@ -9269,7 +9355,31 @@
                 <a:latin typeface="ＭＳ Ｐゴシック"/>
                 <a:ea typeface="ＭＳ Ｐゴシック"/>
               </a:rPr>
-              <a:t>の関数を用いて三角測量を行い３次元座標を推定する</a:t>
+              <a:t>の関数を用いて三角測量を行い</a:t>
+            </a:r>
+            <a:r>
+              <a:rPr lang="ja-JP" altLang="en-US" sz="3200" b="0" u="none" strike="noStrike" dirty="0">
+                <a:solidFill>
+                  <a:schemeClr val="dk1"/>
+                </a:solidFill>
+                <a:effectLst/>
+                <a:uFillTx/>
+                <a:latin typeface="ＭＳ Ｐゴシック"/>
+                <a:ea typeface="ＭＳ Ｐゴシック"/>
+              </a:rPr>
+              <a:t>三</a:t>
+            </a:r>
+            <a:r>
+              <a:rPr lang="ja-JP" sz="3200" b="0" u="none" strike="noStrike" dirty="0">
+                <a:solidFill>
+                  <a:schemeClr val="dk1"/>
+                </a:solidFill>
+                <a:effectLst/>
+                <a:uFillTx/>
+                <a:latin typeface="ＭＳ Ｐゴシック"/>
+                <a:ea typeface="ＭＳ Ｐゴシック"/>
+              </a:rPr>
+              <a:t>次元座標を推定する</a:t>
             </a:r>
             <a:endParaRPr lang="en-US" sz="3200" b="0" u="none" strike="noStrike" dirty="0">
               <a:solidFill>
@@ -9433,7 +9543,7 @@
               <a:buNone/>
             </a:pPr>
             <a:r>
-              <a:rPr lang="ja-JP" sz="4400" b="0" u="none" strike="noStrike">
+              <a:rPr lang="ja-JP" sz="4400" b="0" u="none" strike="noStrike" dirty="0">
                 <a:solidFill>
                   <a:schemeClr val="dk1"/>
                 </a:solidFill>
@@ -9444,7 +9554,7 @@
               </a:rPr>
               <a:t>三角測量について</a:t>
             </a:r>
-            <a:endParaRPr lang="en-US" sz="4400" b="0" u="none" strike="noStrike">
+            <a:endParaRPr lang="en-US" sz="4400" b="0" u="none" strike="noStrike" dirty="0">
               <a:solidFill>
                 <a:schemeClr val="dk1"/>
               </a:solidFill>
@@ -9549,16 +9659,14 @@
               <a:t>()</a:t>
             </a:r>
             <a:r>
-              <a:rPr lang="ja-JP" sz="2800" b="0" u="none" strike="noStrike" dirty="0">
-                <a:solidFill>
-                  <a:schemeClr val="dk1"/>
-                </a:solidFill>
-                <a:effectLst/>
-                <a:uFillTx/>
+              <a:rPr lang="ja-JP" altLang="en-US" sz="2800" dirty="0">
+                <a:solidFill>
+                  <a:schemeClr val="dk1"/>
+                </a:solidFill>
                 <a:latin typeface="ＭＳ Ｐゴシック"/>
                 <a:ea typeface="ＭＳ Ｐゴシック"/>
               </a:rPr>
-              <a:t>を用いて</a:t>
+              <a:t>により</a:t>
             </a:r>
             <a:endParaRPr lang="en-US" sz="2800" b="1" u="none" strike="noStrike" dirty="0">
               <a:solidFill>
@@ -9592,7 +9700,29 @@
                 <a:latin typeface="ＭＳ Ｐゴシック"/>
                 <a:ea typeface="ＭＳ Ｐゴシック"/>
               </a:rPr>
-              <a:t>以下のような方程式を解き三次元座標を推定している。</a:t>
+              <a:t>以下のような方程式を解き</a:t>
+            </a:r>
+            <a:r>
+              <a:rPr lang="ja-JP" altLang="en-US" sz="2800" dirty="0">
+                <a:solidFill>
+                  <a:schemeClr val="dk1"/>
+                </a:solidFill>
+                <a:latin typeface="ＭＳ Ｐゴシック"/>
+                <a:ea typeface="ＭＳ Ｐゴシック"/>
+              </a:rPr>
+              <a:t>三</a:t>
+            </a:r>
+            <a:r>
+              <a:rPr lang="ja-JP" sz="2800" b="0" u="none" strike="noStrike" dirty="0">
+                <a:solidFill>
+                  <a:schemeClr val="dk1"/>
+                </a:solidFill>
+                <a:effectLst/>
+                <a:uFillTx/>
+                <a:latin typeface="ＭＳ Ｐゴシック"/>
+                <a:ea typeface="ＭＳ Ｐゴシック"/>
+              </a:rPr>
+              <a:t>次元座標を推定している。</a:t>
             </a:r>
             <a:endParaRPr lang="en-US" sz="2800" b="1" u="none" strike="noStrike" dirty="0">
               <a:solidFill>
@@ -9991,16 +10121,14 @@
                   <a:t>映像上の対応した</a:t>
                 </a:r>
                 <a:r>
-                  <a:rPr lang="en-US" sz="2800" b="0" u="none" strike="noStrike" dirty="0">
+                  <a:rPr lang="ja-JP" altLang="en-US" sz="2800" dirty="0">
                     <a:solidFill>
                       <a:schemeClr val="dk1"/>
                     </a:solidFill>
-                    <a:effectLst/>
-                    <a:uFillTx/>
                     <a:latin typeface="ＭＳ Ｐゴシック"/>
                     <a:ea typeface="ＭＳ Ｐゴシック"/>
                   </a:rPr>
-                  <a:t>2</a:t>
+                  <a:t>二</a:t>
                 </a:r>
                 <a:r>
                   <a:rPr lang="ja-JP" sz="2800" b="0" u="none" strike="noStrike" dirty="0">
@@ -10136,20 +10264,18 @@
                       </a:rPr>
                       <m:t> : </m:t>
                     </m:r>
+                    <m:r>
+                      <a:rPr lang="ja-JP" altLang="en-US" sz="2800" i="1">
+                        <a:solidFill>
+                          <a:schemeClr val="dk1"/>
+                        </a:solidFill>
+                        <a:latin typeface="Cambria Math" panose="02040503050406030204" pitchFamily="18" charset="0"/>
+                        <a:ea typeface="ＭＳ Ｐゴシック"/>
+                      </a:rPr>
+                      <m:t>三</m:t>
+                    </m:r>
                   </m:oMath>
                 </a14:m>
-                <a:r>
-                  <a:rPr lang="en-US" sz="2800" b="0" u="none" strike="noStrike" dirty="0">
-                    <a:solidFill>
-                      <a:schemeClr val="dk1"/>
-                    </a:solidFill>
-                    <a:effectLst/>
-                    <a:uFillTx/>
-                    <a:latin typeface="ＭＳ Ｐゴシック"/>
-                    <a:ea typeface="ＭＳ Ｐゴシック"/>
-                  </a:rPr>
-                  <a:t>3</a:t>
-                </a:r>
                 <a:r>
                   <a:rPr lang="ja-JP" sz="2800" b="0" u="none" strike="noStrike" dirty="0">
                     <a:solidFill>
